--- a/decks/Microsoft Foundry Guardrails - Tuning Without Over-Blocking.pptx
+++ b/decks/Microsoft Foundry Guardrails - Tuning Without Over-Blocking.pptx
@@ -240,7 +240,7 @@
           </a:lstStyle>
           <a:p>
             <a:fld id="{DFE638C0-F62B-4F35-A91C-D5B1FD7EB574}" type="datetimeFigureOut">
-              <a:t>10/9/2026</a:t>
+              <a:t>11/10/2026</a:t>
             </a:fld>
             <a:endParaRPr lang="en-US"/>
           </a:p>
@@ -1813,7 +1813,7 @@
           <a:p>
             <a:fld id="{5BCAD085-E8A6-8845-BD4E-CB4CCA059FC4}" type="datetimeFigureOut">
               <a:rPr lang="en-US" smtClean="0"/>
-              <a:t>10/9/2026</a:t>
+              <a:t>10/11/2026</a:t>
             </a:fld>
             <a:endParaRPr lang="en-US"/>
           </a:p>
@@ -1981,7 +1981,7 @@
           <a:p>
             <a:fld id="{5BCAD085-E8A6-8845-BD4E-CB4CCA059FC4}" type="datetimeFigureOut">
               <a:rPr lang="en-US" smtClean="0"/>
-              <a:t>10/9/2026</a:t>
+              <a:t>10/11/2026</a:t>
             </a:fld>
             <a:endParaRPr lang="en-US"/>
           </a:p>
@@ -2159,7 +2159,7 @@
           <a:p>
             <a:fld id="{5BCAD085-E8A6-8845-BD4E-CB4CCA059FC4}" type="datetimeFigureOut">
               <a:rPr lang="en-US" smtClean="0"/>
-              <a:t>10/9/2026</a:t>
+              <a:t>10/11/2026</a:t>
             </a:fld>
             <a:endParaRPr lang="en-US"/>
           </a:p>
@@ -2327,7 +2327,7 @@
           <a:p>
             <a:fld id="{5BCAD085-E8A6-8845-BD4E-CB4CCA059FC4}" type="datetimeFigureOut">
               <a:rPr lang="en-US" smtClean="0"/>
-              <a:t>10/9/2026</a:t>
+              <a:t>10/11/2026</a:t>
             </a:fld>
             <a:endParaRPr lang="en-US"/>
           </a:p>
@@ -2572,7 +2572,7 @@
           <a:p>
             <a:fld id="{5BCAD085-E8A6-8845-BD4E-CB4CCA059FC4}" type="datetimeFigureOut">
               <a:rPr lang="en-US" smtClean="0"/>
-              <a:t>10/9/2026</a:t>
+              <a:t>10/11/2026</a:t>
             </a:fld>
             <a:endParaRPr lang="en-US"/>
           </a:p>
@@ -2857,7 +2857,7 @@
           <a:p>
             <a:fld id="{5BCAD085-E8A6-8845-BD4E-CB4CCA059FC4}" type="datetimeFigureOut">
               <a:rPr lang="en-US" smtClean="0"/>
-              <a:t>10/9/2026</a:t>
+              <a:t>10/11/2026</a:t>
             </a:fld>
             <a:endParaRPr lang="en-US"/>
           </a:p>
@@ -3276,7 +3276,7 @@
           <a:p>
             <a:fld id="{5BCAD085-E8A6-8845-BD4E-CB4CCA059FC4}" type="datetimeFigureOut">
               <a:rPr lang="en-US" smtClean="0"/>
-              <a:t>10/9/2026</a:t>
+              <a:t>10/11/2026</a:t>
             </a:fld>
             <a:endParaRPr lang="en-US"/>
           </a:p>
@@ -3393,7 +3393,7 @@
           <a:p>
             <a:fld id="{5BCAD085-E8A6-8845-BD4E-CB4CCA059FC4}" type="datetimeFigureOut">
               <a:rPr lang="en-US" smtClean="0"/>
-              <a:t>10/9/2026</a:t>
+              <a:t>10/11/2026</a:t>
             </a:fld>
             <a:endParaRPr lang="en-US"/>
           </a:p>
@@ -3488,7 +3488,7 @@
           <a:p>
             <a:fld id="{5BCAD085-E8A6-8845-BD4E-CB4CCA059FC4}" type="datetimeFigureOut">
               <a:rPr lang="en-US" smtClean="0"/>
-              <a:t>10/9/2026</a:t>
+              <a:t>10/11/2026</a:t>
             </a:fld>
             <a:endParaRPr lang="en-US"/>
           </a:p>
@@ -3763,7 +3763,7 @@
           <a:p>
             <a:fld id="{5BCAD085-E8A6-8845-BD4E-CB4CCA059FC4}" type="datetimeFigureOut">
               <a:rPr lang="en-US" smtClean="0"/>
-              <a:t>10/9/2026</a:t>
+              <a:t>10/11/2026</a:t>
             </a:fld>
             <a:endParaRPr lang="en-US"/>
           </a:p>
@@ -4015,7 +4015,7 @@
           <a:p>
             <a:fld id="{5BCAD085-E8A6-8845-BD4E-CB4CCA059FC4}" type="datetimeFigureOut">
               <a:rPr lang="en-US" smtClean="0"/>
-              <a:t>10/9/2026</a:t>
+              <a:t>10/11/2026</a:t>
             </a:fld>
             <a:endParaRPr lang="en-US"/>
           </a:p>
@@ -4226,7 +4226,7 @@
           <a:p>
             <a:fld id="{5BCAD085-E8A6-8845-BD4E-CB4CCA059FC4}" type="datetimeFigureOut">
               <a:rPr lang="en-US" smtClean="0"/>
-              <a:t>10/9/2026</a:t>
+              <a:t>10/11/2026</a:t>
             </a:fld>
             <a:endParaRPr lang="en-US"/>
           </a:p>
@@ -4870,96 +4870,6 @@
                 <a:latin typeface="Segoe UI" panose="020B0502040204020203" pitchFamily="34" charset="0"/>
               </a:rPr>
               <a:t>An overview of the two content-safety layers in Microsoft Foundry: how each layer works, how they differ, and how guardrail settings can be adjusted on the basis of measured results.</a:t>
-            </a:r>
-            <a:endParaRPr lang="en-US"/>
-          </a:p>
-        </p:txBody>
-      </p:sp>
-      <p:sp>
-        <p:nvSpPr>
-          <p:cNvPr id="84" name="Rectangle 83">
-            <a:extLst>
-              <a:ext uri="{FF2B5EF4-FFF2-40B4-BE49-F238E27FC236}">
-                <a16:creationId xmlns:a16="http://schemas.microsoft.com/office/drawing/2014/main" id="{44738BED-A995-A190-BA24-2B07A59ADB8B}"/>
-              </a:ext>
-            </a:extLst>
-          </p:cNvPr>
-          <p:cNvSpPr/>
-          <p:nvPr/>
-        </p:nvSpPr>
-        <p:spPr>
-          <a:xfrm>
-            <a:off x="603504" y="5760720"/>
-            <a:ext cx="6949440" cy="640080"/>
-          </a:xfrm>
-          <a:prstGeom prst="rect">
-            <a:avLst/>
-          </a:prstGeom>
-          <a:solidFill>
-            <a:srgbClr val="FFFFFF">
-              <a:alpha val="0"/>
-            </a:srgbClr>
-          </a:solidFill>
-          <a:ln>
-            <a:solidFill>
-              <a:srgbClr val="FFFFFF">
-                <a:alpha val="0"/>
-              </a:srgbClr>
-            </a:solidFill>
-          </a:ln>
-          <a:effectLst>
-            <a:outerShdw algn="ctr">
-              <a:srgbClr val="000000">
-                <a:alpha val="0"/>
-              </a:srgbClr>
-            </a:outerShdw>
-          </a:effectLst>
-        </p:spPr>
-        <p:style>
-          <a:lnRef idx="1">
-            <a:schemeClr val="accent1"/>
-          </a:lnRef>
-          <a:fillRef idx="3">
-            <a:schemeClr val="accent1"/>
-          </a:fillRef>
-          <a:effectRef idx="2">
-            <a:schemeClr val="accent1"/>
-          </a:effectRef>
-          <a:fontRef idx="minor">
-            <a:schemeClr val="lt1"/>
-          </a:fontRef>
-        </p:style>
-        <p:txBody>
-          <a:bodyPr rtlCol="0" anchor="ctr"/>
-          <a:lstStyle/>
-          <a:p>
-            <a:pPr algn="l">
-              <a:buNone/>
-            </a:pPr>
-            <a:r>
-              <a:rPr lang="en-US" sz="1200">
-                <a:solidFill>
-                  <a:srgbClr val="201F1E"/>
-                </a:solidFill>
-                <a:effectLst/>
-                <a:latin typeface="Segoe UI" panose="020B0502040204020203" pitchFamily="34" charset="0"/>
-              </a:rPr>
-              <a:t>Reference implementation: github.com/strudel0209/foundry-content-safety-eval</a:t>
-            </a:r>
-          </a:p>
-          <a:p>
-            <a:pPr algn="l">
-              <a:buNone/>
-            </a:pPr>
-            <a:r>
-              <a:rPr lang="en-US" sz="1200" b="1">
-                <a:solidFill>
-                  <a:srgbClr val="243A5E"/>
-                </a:solidFill>
-                <a:effectLst/>
-                <a:latin typeface="Segoe UI" panose="020B0502040204020203" pitchFamily="34" charset="0"/>
-              </a:rPr>
-              <a:t>Alex Sachelarescu · Cloud Solution Architect · Microsoft Switzerland</a:t>
             </a:r>
             <a:endParaRPr lang="en-US"/>
           </a:p>
@@ -31774,6 +31684,6 @@
 
 <file path=docMetadata/LabelInfo.xml><?xml version="1.0" encoding="utf-8"?>
 <clbl:labelList xmlns:clbl="http://schemas.microsoft.com/office/2020/mipLabelMetadata">
-  <clbl:label id="{f42aa342-8706-4288-bd11-ebb85995028c}" enabled="1" method="Standard" siteId="{72f988bf-86f1-41af-91ab-2d7cd011db47}" contentBits="0" removed="0"/>
+  <clbl:label id="{87867195-f2b8-4ac2-b0b6-6bb73cb33afc}" enabled="1" method="Privileged" siteId="{72f988bf-86f1-41af-91ab-2d7cd011db47}" contentBits="0" removed="0"/>
 </clbl:labelList>
 </file>